--- a/Programmierworkshop.pptx
+++ b/Programmierworkshop.pptx
@@ -26236,7 +26236,7 @@
             <a:pPr rtl="0"/>
             <a:fld id="{754A2EA4-0B56-441C-A9D3-5AD09C9F1422}" type="datetime1">
               <a:rPr lang="de-DE" smtClean="0"/>
-              <a:t>19.02.2025</a:t>
+              <a:t>06.07.2026</a:t>
             </a:fld>
             <a:endParaRPr lang="de-DE"/>
           </a:p>
@@ -26418,7 +26418,7 @@
             <a:fld id="{01B085CE-6145-404E-B599-68FDF26648DF}" type="datetime1">
               <a:rPr lang="de-DE" smtClean="0"/>
               <a:pPr/>
-              <a:t>19.02.2025</a:t>
+              <a:t>06.07.2026</a:t>
             </a:fld>
             <a:endParaRPr lang="de-DE" dirty="0"/>
           </a:p>
@@ -27000,6 +27000,13 @@
             <a:schemeClr val="lt1"/>
           </a:fontRef>
         </p:style>
+        <p:txBody>
+          <a:bodyPr/>
+          <a:lstStyle/>
+          <a:p>
+            <a:endParaRPr lang="de-DE"/>
+          </a:p>
+        </p:txBody>
       </p:sp>
       <p:sp>
         <p:nvSpPr>
@@ -27193,7 +27200,7 @@
             <a:pPr rtl="0"/>
             <a:fld id="{CAC03BF4-324D-444B-B2B4-5879EFE83EC5}" type="datetime1">
               <a:rPr lang="de-DE" noProof="0" smtClean="0"/>
-              <a:t>19.02.2025</a:t>
+              <a:t>06.07.2026</a:t>
             </a:fld>
             <a:endParaRPr lang="de-DE" noProof="0"/>
           </a:p>
@@ -27458,7 +27465,7 @@
             <a:pPr rtl="0"/>
             <a:fld id="{6714D70A-F3C5-4A6E-9522-4175BD08EA7F}" type="datetime1">
               <a:rPr lang="de-DE" noProof="0" smtClean="0"/>
-              <a:t>19.02.2025</a:t>
+              <a:t>06.07.2026</a:t>
             </a:fld>
             <a:endParaRPr lang="de-DE" noProof="0"/>
           </a:p>
@@ -27696,7 +27703,7 @@
             <a:pPr rtl="0"/>
             <a:fld id="{E4688D79-9856-49D3-A6E5-0DDD62E7F21D}" type="datetime1">
               <a:rPr lang="de-DE" noProof="0" smtClean="0"/>
-              <a:t>19.02.2025</a:t>
+              <a:t>06.07.2026</a:t>
             </a:fld>
             <a:endParaRPr lang="de-DE" noProof="0"/>
           </a:p>
@@ -27945,7 +27952,7 @@
             <a:pPr rtl="0"/>
             <a:fld id="{5BDE1979-03AF-4780-AA12-4B63DE69AC45}" type="datetime1">
               <a:rPr lang="de-DE" noProof="0" smtClean="0"/>
-              <a:t>19.02.2025</a:t>
+              <a:t>06.07.2026</a:t>
             </a:fld>
             <a:endParaRPr lang="de-DE" noProof="0"/>
           </a:p>
@@ -28256,7 +28263,7 @@
             <a:pPr rtl="0"/>
             <a:fld id="{5D6A1D9F-0411-49EB-8C99-09648CED7900}" type="datetime1">
               <a:rPr lang="de-DE" noProof="0" smtClean="0"/>
-              <a:t>19.02.2025</a:t>
+              <a:t>06.07.2026</a:t>
             </a:fld>
             <a:endParaRPr lang="de-DE" noProof="0"/>
           </a:p>
@@ -28566,7 +28573,7 @@
             <a:pPr rtl="0"/>
             <a:fld id="{97277A7A-EAFE-4BD9-883A-190BF6213361}" type="datetime1">
               <a:rPr lang="de-DE" noProof="0" smtClean="0"/>
-              <a:t>19.02.2025</a:t>
+              <a:t>06.07.2026</a:t>
             </a:fld>
             <a:endParaRPr lang="de-DE" noProof="0"/>
           </a:p>
@@ -28990,7 +28997,7 @@
             <a:pPr rtl="0"/>
             <a:fld id="{5B7AF743-5D3F-4201-BC3F-6547FAFA22B9}" type="datetime1">
               <a:rPr lang="de-DE" noProof="0" smtClean="0"/>
-              <a:t>19.02.2025</a:t>
+              <a:t>06.07.2026</a:t>
             </a:fld>
             <a:endParaRPr lang="de-DE" noProof="0"/>
           </a:p>
@@ -29089,7 +29096,7 @@
             <a:pPr rtl="0"/>
             <a:fld id="{72D69A12-2F55-4BC0-8DE6-9A20F0D713DC}" type="datetime1">
               <a:rPr lang="de-DE" noProof="0" smtClean="0"/>
-              <a:t>19.02.2025</a:t>
+              <a:t>06.07.2026</a:t>
             </a:fld>
             <a:endParaRPr lang="de-DE" noProof="0"/>
           </a:p>
@@ -29255,7 +29262,7 @@
             <a:pPr rtl="0"/>
             <a:fld id="{6112B84F-57B3-4CC5-9030-860002DF7D30}" type="datetime1">
               <a:rPr lang="de-DE" noProof="0" smtClean="0"/>
-              <a:t>19.02.2025</a:t>
+              <a:t>06.07.2026</a:t>
             </a:fld>
             <a:endParaRPr lang="de-DE" noProof="0"/>
           </a:p>
@@ -29636,7 +29643,7 @@
             <a:pPr rtl="0"/>
             <a:fld id="{879E7381-8FDF-40EE-9279-25401C84A40A}" type="datetime1">
               <a:rPr lang="de-DE" noProof="0" smtClean="0"/>
-              <a:t>19.02.2025</a:t>
+              <a:t>06.07.2026</a:t>
             </a:fld>
             <a:endParaRPr lang="de-DE" noProof="0" dirty="0"/>
           </a:p>
@@ -29929,7 +29936,7 @@
             <a:pPr rtl="0"/>
             <a:fld id="{B1189B38-3700-4F31-B929-FDC2A865E208}" type="datetime1">
               <a:rPr lang="de-DE" noProof="0" smtClean="0"/>
-              <a:t>19.02.2025</a:t>
+              <a:t>06.07.2026</a:t>
             </a:fld>
             <a:endParaRPr lang="de-DE" noProof="0"/>
           </a:p>
@@ -30143,7 +30150,7 @@
             <a:pPr rtl="0"/>
             <a:fld id="{43214D96-B3C8-4F1E-B664-5DE2819FAB83}" type="datetime1">
               <a:rPr lang="de-DE" noProof="0" smtClean="0"/>
-              <a:t>19.02.2025</a:t>
+              <a:t>06.07.2026</a:t>
             </a:fld>
             <a:endParaRPr lang="de-DE" noProof="0" dirty="0"/>
           </a:p>
@@ -30262,6 +30269,13 @@
             <a:schemeClr val="lt1"/>
           </a:fontRef>
         </p:style>
+        <p:txBody>
+          <a:bodyPr/>
+          <a:lstStyle/>
+          <a:p>
+            <a:endParaRPr lang="de-DE"/>
+          </a:p>
+        </p:txBody>
       </p:sp>
       <p:sp>
         <p:nvSpPr>
@@ -30299,6 +30313,13 @@
             <a:schemeClr val="lt1"/>
           </a:fontRef>
         </p:style>
+        <p:txBody>
+          <a:bodyPr/>
+          <a:lstStyle/>
+          <a:p>
+            <a:endParaRPr lang="de-DE"/>
+          </a:p>
+        </p:txBody>
       </p:sp>
       <p:sp>
         <p:nvSpPr>
@@ -30336,6 +30357,13 @@
             <a:schemeClr val="lt1"/>
           </a:fontRef>
         </p:style>
+        <p:txBody>
+          <a:bodyPr/>
+          <a:lstStyle/>
+          <a:p>
+            <a:endParaRPr lang="de-DE"/>
+          </a:p>
+        </p:txBody>
       </p:sp>
     </p:spTree>
     <p:extLst>
@@ -32074,7 +32102,7 @@
 </file>
 
 <file path=ppt/slides/slide4.xml><?xml version="1.0" encoding="utf-8"?>
-<p:sld xmlns:a="http://schemas.openxmlformats.org/drawingml/2006/main" xmlns:r="http://schemas.openxmlformats.org/officeDocument/2006/relationships" xmlns:p="http://schemas.openxmlformats.org/presentationml/2006/main">
+<p:sld xmlns:a="http://schemas.openxmlformats.org/drawingml/2006/main" xmlns:r="http://schemas.openxmlformats.org/officeDocument/2006/relationships" xmlns:p="http://schemas.openxmlformats.org/presentationml/2006/main" show="0">
   <p:cSld>
     <p:spTree>
       <p:nvGrpSpPr>
